--- a/CognitiveClaw_Presentation.pptx
+++ b/CognitiveClaw_Presentation.pptx
@@ -120,6 +120,66 @@
     </p:ext>
   </p:extLst>
 </p:presentation>
+</file>
+
+<file path=ppt/revisionInfo.xml><?xml version="1.0" encoding="utf-8"?>
+<p1510:revInfo xmlns:a="http://schemas.openxmlformats.org/drawingml/2006/main" xmlns:r="http://schemas.openxmlformats.org/officeDocument/2006/relationships" xmlns:p1510="http://schemas.microsoft.com/office/powerpoint/2015/10/main">
+  <p1510:revLst>
+    <p1510:client id="{3A21EC2B-0C59-48DD-9B08-BA127A4089B7}" v="2" dt="2026-05-09T07:52:57.949"/>
+  </p1510:revLst>
+</p1510:revInfo>
+</file>
+
+<file path=ppt/changesInfos/changesInfo1.xml><?xml version="1.0" encoding="utf-8"?>
+<pc:chgInfo xmlns:a="http://schemas.openxmlformats.org/drawingml/2006/main" xmlns:r="http://schemas.openxmlformats.org/officeDocument/2006/relationships" xmlns:ac="http://schemas.microsoft.com/office/drawing/2013/main/command" xmlns:pc="http://schemas.microsoft.com/office/powerpoint/2013/main/command">
+  <pc:docChgLst>
+    <pc:chgData name="Amith gowda" userId="69bfd0c6cb05fad5" providerId="LiveId" clId="{48224819-2350-487B-9D68-A87FB3B84215}"/>
+    <pc:docChg chg="modSld">
+      <pc:chgData name="Amith gowda" userId="69bfd0c6cb05fad5" providerId="LiveId" clId="{48224819-2350-487B-9D68-A87FB3B84215}" dt="2026-05-09T07:52:57.889" v="51" actId="20577"/>
+      <pc:docMkLst>
+        <pc:docMk/>
+      </pc:docMkLst>
+      <pc:sldChg chg="modSp mod">
+        <pc:chgData name="Amith gowda" userId="69bfd0c6cb05fad5" providerId="LiveId" clId="{48224819-2350-487B-9D68-A87FB3B84215}" dt="2026-05-09T03:11:06.427" v="32" actId="207"/>
+        <pc:sldMkLst>
+          <pc:docMk/>
+          <pc:sldMk cId="0" sldId="261"/>
+        </pc:sldMkLst>
+        <pc:spChg chg="mod">
+          <ac:chgData name="Amith gowda" userId="69bfd0c6cb05fad5" providerId="LiveId" clId="{48224819-2350-487B-9D68-A87FB3B84215}" dt="2026-05-09T03:11:06.427" v="32" actId="207"/>
+          <ac:spMkLst>
+            <pc:docMk/>
+            <pc:sldMk cId="0" sldId="261"/>
+            <ac:spMk id="17" creationId="{00000000-0000-0000-0000-000000000000}"/>
+          </ac:spMkLst>
+        </pc:spChg>
+      </pc:sldChg>
+      <pc:sldChg chg="modSp mod">
+        <pc:chgData name="Amith gowda" userId="69bfd0c6cb05fad5" providerId="LiveId" clId="{48224819-2350-487B-9D68-A87FB3B84215}" dt="2026-05-09T07:52:57.889" v="51" actId="20577"/>
+        <pc:sldMkLst>
+          <pc:docMk/>
+          <pc:sldMk cId="0" sldId="264"/>
+        </pc:sldMkLst>
+        <pc:spChg chg="mod">
+          <ac:chgData name="Amith gowda" userId="69bfd0c6cb05fad5" providerId="LiveId" clId="{48224819-2350-487B-9D68-A87FB3B84215}" dt="2026-05-09T03:11:57.464" v="49" actId="20577"/>
+          <ac:spMkLst>
+            <pc:docMk/>
+            <pc:sldMk cId="0" sldId="264"/>
+            <ac:spMk id="18" creationId="{00000000-0000-0000-0000-000000000000}"/>
+          </ac:spMkLst>
+        </pc:spChg>
+        <pc:spChg chg="mod">
+          <ac:chgData name="Amith gowda" userId="69bfd0c6cb05fad5" providerId="LiveId" clId="{48224819-2350-487B-9D68-A87FB3B84215}" dt="2026-05-09T07:52:57.889" v="51" actId="20577"/>
+          <ac:spMkLst>
+            <pc:docMk/>
+            <pc:sldMk cId="0" sldId="264"/>
+            <ac:spMk id="19" creationId="{00000000-0000-0000-0000-000000000000}"/>
+          </ac:spMkLst>
+        </pc:spChg>
+      </pc:sldChg>
+    </pc:docChg>
+  </pc:docChgLst>
+</pc:chgInfo>
 </file>
 
 <file path=ppt/notesMasters/notesMaster1.xml><?xml version="1.0" encoding="utf-8"?>
@@ -9852,32 +9912,14 @@
             <a:r>
               <a:rPr lang="en-US" sz="1050" dirty="0">
                 <a:solidFill>
-                  <a:srgbClr val="555555"/>
-                </a:solidFill>
-                <a:latin typeface="Calibri" pitchFamily="34" charset="0"/>
-                <a:ea typeface="Calibri" pitchFamily="34" charset="-122"/>
-                <a:cs typeface="Calibri" pitchFamily="34" charset="-120"/>
-              </a:rPr>
-              <a:t>Mistral 7B</a:t>
-            </a:r>
-          </a:p>
-          <a:p>
-            <a:pPr marL="342900" indent="-342900" algn="l">
-              <a:buSzPct val="100000"/>
-              <a:buChar char="•"/>
-            </a:pPr>
-            <a:r>
-              <a:rPr lang="en-US" sz="1050" dirty="0">
-                <a:solidFill>
-                  <a:srgbClr val="555555"/>
-                </a:solidFill>
-                <a:latin typeface="Calibri" pitchFamily="34" charset="0"/>
-                <a:ea typeface="Calibri" pitchFamily="34" charset="-122"/>
-                <a:cs typeface="Calibri" pitchFamily="34" charset="-120"/>
-              </a:rPr>
-              <a:t>Llama 70B</a:t>
-            </a:r>
-            <a:endParaRPr lang="en-US" sz="1050" dirty="0"/>
+                  <a:schemeClr val="tx1">
+                    <a:lumMod val="65000"/>
+                    <a:lumOff val="35000"/>
+                  </a:schemeClr>
+                </a:solidFill>
+              </a:rPr>
+              <a:t>GLM 4.5 Air</a:t>
+            </a:r>
           </a:p>
           <a:p>
             <a:pPr marL="342900" indent="-342900" algn="l">
@@ -13507,7 +13549,7 @@
                 <a:ea typeface="Calibri" pitchFamily="34" charset="-122"/>
                 <a:cs typeface="Calibri" pitchFamily="34" charset="-120"/>
               </a:rPr>
-              <a:t>Full product walkthrough — 3 to 5 minutes</a:t>
+              <a:t>Full product walkthrough</a:t>
             </a:r>
             <a:endParaRPr lang="en-US" sz="1100" dirty="0"/>
           </a:p>
@@ -13534,9 +13576,6 @@
           <a:bodyPr wrap="square" rtlCol="0" anchor="ctr"/>
           <a:lstStyle/>
           <a:p>
-            <a:pPr marL="0" indent="0" algn="l">
-              <a:buNone/>
-            </a:pPr>
             <a:r>
               <a:rPr lang="en-US" sz="1100" i="1" dirty="0">
                 <a:solidFill>
@@ -13545,9 +13584,20 @@
                 <a:latin typeface="Calibri" pitchFamily="34" charset="0"/>
                 <a:ea typeface="Calibri" pitchFamily="34" charset="-122"/>
                 <a:cs typeface="Calibri" pitchFamily="34" charset="-120"/>
-              </a:rPr>
-              <a:t>[YouTube / Google Drive Link Here]</a:t>
-            </a:r>
+                <a:hlinkClick r:id="rId4"/>
+              </a:rPr>
+              <a:t>https://drive.google.com/drive/folders/1Cv8gZVs3T-3lVJVkQf6udaqevV5hLc-d?usp=drive_link</a:t>
+            </a:r>
+            <a:endParaRPr lang="en-US" sz="1100" i="1" dirty="0">
+              <a:solidFill>
+                <a:srgbClr val="00B4D8"/>
+              </a:solidFill>
+              <a:latin typeface="Calibri" pitchFamily="34" charset="0"/>
+              <a:ea typeface="Calibri" pitchFamily="34" charset="-122"/>
+              <a:cs typeface="Calibri" pitchFamily="34" charset="-120"/>
+            </a:endParaRPr>
+          </a:p>
+          <a:p>
             <a:endParaRPr lang="en-US" sz="1100" dirty="0"/>
           </a:p>
         </p:txBody>
